--- a/classes/parte-4-seguridad-de-aplicaciones-web/108-vulnerabilidades-en-carga-de-archivos/clase-108-presentacion.pptx
+++ b/classes/parte-4-seguridad-de-aplicaciones-web/108-vulnerabilidades-en-carga-de-archivos/clase-108-presentacion.pptx
@@ -17,6 +17,9 @@
     <p:sldId id="265" r:id="rId16"/>
     <p:sldId id="266" r:id="rId17"/>
     <p:sldId id="267" r:id="rId18"/>
+    <p:sldId id="268" r:id="rId19"/>
+    <p:sldId id="269" r:id="rId20"/>
+    <p:sldId id="270" r:id="rId21"/>
   </p:sldIdLst>
   <p:sldSz cx="9144000" cy="6858000" type="screen4x3"/>
   <p:notesSz cx="6858000" cy="9144000"/>
@@ -3198,7 +3201,7 @@
                   <a:srgbClr val="0B3D2E"/>
                 </a:solidFill>
               </a:rPr>
-              <a:t>⚠️ Errores comunes</a:t>
+              <a:t>✍️ Ejercicios</a:t>
             </a:r>
           </a:p>
         </p:txBody>
@@ -3236,67 +3239,82 @@
                   <a:srgbClr val="22282E"/>
                 </a:solidFill>
               </a:rPr>
-              <a:t>•  Extensión rechazada — Blocklist; prueba variantes o doble extensión</a:t>
-            </a:r>
-          </a:p>
-          <a:p>
-            <a:pPr>
-              <a:spcAft>
-                <a:spcPts val="600"/>
-              </a:spcAft>
-            </a:pPr>
-            <a:r>
-              <a:rPr sz="1500">
-                <a:solidFill>
-                  <a:srgbClr val="22282E"/>
-                </a:solidFill>
-              </a:rPr>
-              <a:t>•  Se sube pero no ejecuta — Fuera del webroot o sin handler PHP; busca ubicación ejecutable</a:t>
-            </a:r>
-          </a:p>
-          <a:p>
-            <a:pPr>
-              <a:spcAft>
-                <a:spcPts val="600"/>
-              </a:spcAft>
-            </a:pPr>
-            <a:r>
-              <a:rPr sz="1500">
-                <a:solidFill>
-                  <a:srgbClr val="22282E"/>
-                </a:solidFill>
-              </a:rPr>
-              <a:t>•  Content-Type validado — Falsifícalo en Burp manteniendo el contenido</a:t>
-            </a:r>
-          </a:p>
-          <a:p>
-            <a:pPr>
-              <a:spcAft>
-                <a:spcPts val="600"/>
-              </a:spcAft>
-            </a:pPr>
-            <a:r>
-              <a:rPr sz="1500">
-                <a:solidFill>
-                  <a:srgbClr val="22282E"/>
-                </a:solidFill>
-              </a:rPr>
-              <a:t>•  Magic bytes comprobados — Antepón la firma del tipo permitido</a:t>
-            </a:r>
-          </a:p>
-          <a:p>
-            <a:pPr>
-              <a:spcAft>
-                <a:spcPts val="600"/>
-              </a:spcAft>
-            </a:pPr>
-            <a:r>
-              <a:rPr sz="1500">
-                <a:solidFill>
-                  <a:srgbClr val="22282E"/>
-                </a:solidFill>
-              </a:rPr>
-              <a:t>•  Nombre saneado — Path traversal bloqueado; prueba encoding</a:t>
+              <a:t>•  Enumera 5 extensiones alternativas que pueden ejecutar código PHP.</a:t>
+            </a:r>
+          </a:p>
+          <a:p>
+            <a:pPr>
+              <a:spcAft>
+                <a:spcPts val="600"/>
+              </a:spcAft>
+            </a:pPr>
+            <a:r>
+              <a:rPr sz="1500">
+                <a:solidFill>
+                  <a:srgbClr val="22282E"/>
+                </a:solidFill>
+              </a:rPr>
+              <a:t>•  Evade una validación por Content-Type y otra por magic bytes.</a:t>
+            </a:r>
+          </a:p>
+          <a:p>
+            <a:pPr>
+              <a:spcAft>
+                <a:spcPts val="600"/>
+              </a:spcAft>
+            </a:pPr>
+            <a:r>
+              <a:rPr sz="1500">
+                <a:solidFill>
+                  <a:srgbClr val="22282E"/>
+                </a:solidFill>
+              </a:rPr>
+              <a:t>•  Sube un SVG que ejecute JavaScript (XSS almacenado).</a:t>
+            </a:r>
+          </a:p>
+          <a:p>
+            <a:pPr>
+              <a:spcAft>
+                <a:spcPts val="600"/>
+              </a:spcAft>
+            </a:pPr>
+            <a:r>
+              <a:rPr sz="1500">
+                <a:solidFill>
+                  <a:srgbClr val="22282E"/>
+                </a:solidFill>
+              </a:rPr>
+              <a:t>•  Usa ../ en el nombre para intentar sobrescribir un archivo.</a:t>
+            </a:r>
+          </a:p>
+          <a:p>
+            <a:pPr>
+              <a:spcAft>
+                <a:spcPts val="600"/>
+              </a:spcAft>
+            </a:pPr>
+            <a:r>
+              <a:rPr sz="1500">
+                <a:solidFill>
+                  <a:srgbClr val="22282E"/>
+                </a:solidFill>
+              </a:rPr>
+              <a:t>•  Explica por qué guardar fuera del webroot mitiga el RCE.</a:t>
+            </a:r>
+          </a:p>
+          <a:p>
+            <a:pPr>
+              <a:spcAft>
+                <a:spcPts val="600"/>
+              </a:spcAft>
+            </a:pPr>
+            <a:r>
+              <a:rPr sz="1500">
+                <a:solidFill>
+                  <a:srgbClr val="22282E"/>
+                </a:solidFill>
+              </a:rPr>
+              <a:t>•  Diseña una validación de upload robusta (allowlist + renombrado + escaneo).</a:t>
             </a:r>
           </a:p>
         </p:txBody>
@@ -3347,7 +3365,7 @@
                   <a:srgbClr val="0B3D2E"/>
                 </a:solidFill>
               </a:rPr>
-              <a:t>❓ Preguntas frecuentes</a:t>
+              <a:t>📝 Reto verificable</a:t>
             </a:r>
           </a:p>
         </p:txBody>
@@ -3385,82 +3403,22 @@
                   <a:srgbClr val="22282E"/>
                 </a:solidFill>
               </a:rPr>
-              <a:t>•  ❓ ¿Basta validar la extensión?</a:t>
-            </a:r>
-          </a:p>
-          <a:p>
-            <a:pPr>
-              <a:spcAft>
-                <a:spcPts val="600"/>
-              </a:spcAft>
-            </a:pPr>
-            <a:r>
-              <a:rPr sz="1500">
-                <a:solidFill>
-                  <a:srgbClr val="22282E"/>
-                </a:solidFill>
-              </a:rPr>
-              <a:t>•  No. Hay que validar tipo real, renombrar, y sobre todo almacenar donde no se ejecute el contenido.</a:t>
-            </a:r>
-          </a:p>
-          <a:p>
-            <a:pPr>
-              <a:spcAft>
-                <a:spcPts val="600"/>
-              </a:spcAft>
-            </a:pPr>
-            <a:r>
-              <a:rPr sz="1500">
-                <a:solidFill>
-                  <a:srgbClr val="22282E"/>
-                </a:solidFill>
-              </a:rPr>
-              <a:t>•  ❓ ¿Por qué un SVG es peligroso?</a:t>
-            </a:r>
-          </a:p>
-          <a:p>
-            <a:pPr>
-              <a:spcAft>
-                <a:spcPts val="600"/>
-              </a:spcAft>
-            </a:pPr>
-            <a:r>
-              <a:rPr sz="1500">
-                <a:solidFill>
-                  <a:srgbClr val="22282E"/>
-                </a:solidFill>
-              </a:rPr>
-              <a:t>•  Porque es XML y puede contener JavaScript; servido inline, ejecuta XSS en el contexto de la app.</a:t>
-            </a:r>
-          </a:p>
-          <a:p>
-            <a:pPr>
-              <a:spcAft>
-                <a:spcPts val="600"/>
-              </a:spcAft>
-            </a:pPr>
-            <a:r>
-              <a:rPr sz="1500">
-                <a:solidFill>
-                  <a:srgbClr val="22282E"/>
-                </a:solidFill>
-              </a:rPr>
-              <a:t>•  ❓ ¿Dónde guardo los uploads?</a:t>
-            </a:r>
-          </a:p>
-          <a:p>
-            <a:pPr>
-              <a:spcAft>
-                <a:spcPts val="600"/>
-              </a:spcAft>
-            </a:pPr>
-            <a:r>
-              <a:rPr sz="1500">
-                <a:solidFill>
-                  <a:srgbClr val="22282E"/>
-                </a:solidFill>
-              </a:rPr>
-              <a:t>•  Fuera del directorio web servible, con nombres generados, y sírvelos con Content-Type y Content-Disposition seguros.</a:t>
+              <a:t>•  Consigue RCE subiendo una web shell en un lab (DVWA Medium o PortSwigger) evadiendo al menos una validación, y ejecuta un comando.</a:t>
+            </a:r>
+          </a:p>
+          <a:p>
+            <a:pPr>
+              <a:spcAft>
+                <a:spcPts val="600"/>
+              </a:spcAft>
+            </a:pPr>
+            <a:r>
+              <a:rPr sz="1500">
+                <a:solidFill>
+                  <a:srgbClr val="22282E"/>
+                </a:solidFill>
+              </a:rPr>
+              <a:t>•  Criterio de aceptación: entregas el archivo subido, la validación evadida, la evidencia de ejecución de comando y la corrección (allowlist, renombrado, almacenamiento fuera del webroot).</a:t>
             </a:r>
           </a:p>
         </p:txBody>
@@ -3511,7 +3469,7 @@
                   <a:srgbClr val="0B3D2E"/>
                 </a:solidFill>
               </a:rPr>
-              <a:t>🔗 Referencias</a:t>
+              <a:t>⚠️ Errores comunes</a:t>
             </a:r>
           </a:p>
         </p:txBody>
@@ -3549,6 +3507,319 @@
                   <a:srgbClr val="22282E"/>
                 </a:solidFill>
               </a:rPr>
+              <a:t>•  Extensión rechazada — Blocklist; prueba variantes o doble extensión</a:t>
+            </a:r>
+          </a:p>
+          <a:p>
+            <a:pPr>
+              <a:spcAft>
+                <a:spcPts val="600"/>
+              </a:spcAft>
+            </a:pPr>
+            <a:r>
+              <a:rPr sz="1500">
+                <a:solidFill>
+                  <a:srgbClr val="22282E"/>
+                </a:solidFill>
+              </a:rPr>
+              <a:t>•  Se sube pero no ejecuta — Fuera del webroot o sin handler PHP; busca ubicación ejecutable</a:t>
+            </a:r>
+          </a:p>
+          <a:p>
+            <a:pPr>
+              <a:spcAft>
+                <a:spcPts val="600"/>
+              </a:spcAft>
+            </a:pPr>
+            <a:r>
+              <a:rPr sz="1500">
+                <a:solidFill>
+                  <a:srgbClr val="22282E"/>
+                </a:solidFill>
+              </a:rPr>
+              <a:t>•  Content-Type validado — Falsifícalo en Burp manteniendo el contenido</a:t>
+            </a:r>
+          </a:p>
+          <a:p>
+            <a:pPr>
+              <a:spcAft>
+                <a:spcPts val="600"/>
+              </a:spcAft>
+            </a:pPr>
+            <a:r>
+              <a:rPr sz="1500">
+                <a:solidFill>
+                  <a:srgbClr val="22282E"/>
+                </a:solidFill>
+              </a:rPr>
+              <a:t>•  Magic bytes comprobados — Antepón la firma del tipo permitido</a:t>
+            </a:r>
+          </a:p>
+          <a:p>
+            <a:pPr>
+              <a:spcAft>
+                <a:spcPts val="600"/>
+              </a:spcAft>
+            </a:pPr>
+            <a:r>
+              <a:rPr sz="1500">
+                <a:solidFill>
+                  <a:srgbClr val="22282E"/>
+                </a:solidFill>
+              </a:rPr>
+              <a:t>•  Nombre saneado — Path traversal bloqueado; prueba encoding</a:t>
+            </a:r>
+          </a:p>
+        </p:txBody>
+      </p:sp>
+    </p:spTree>
+  </p:cSld>
+  <p:clrMapOvr>
+    <a:masterClrMapping/>
+  </p:clrMapOvr>
+</p:sld>
+</file>
+
+<file path=ppt/slides/slide13.xml><?xml version="1.0" encoding="utf-8"?>
+<p:sld xmlns:a="http://schemas.openxmlformats.org/drawingml/2006/main" xmlns:p="http://schemas.openxmlformats.org/presentationml/2006/main" xmlns:r="http://schemas.openxmlformats.org/officeDocument/2006/relationships">
+  <p:cSld>
+    <p:spTree>
+      <p:nvGrpSpPr>
+        <p:cNvPr id="1" name=""/>
+        <p:cNvGrpSpPr/>
+        <p:nvPr/>
+      </p:nvGrpSpPr>
+      <p:grpSpPr/>
+      <p:sp>
+        <p:nvSpPr>
+          <p:cNvPr id="2" name="TextBox 1"/>
+          <p:cNvSpPr txBox="1"/>
+          <p:nvPr/>
+        </p:nvSpPr>
+        <p:spPr>
+          <a:xfrm>
+            <a:off x="457200" y="320040"/>
+            <a:ext cx="8229600" cy="822960"/>
+          </a:xfrm>
+          <a:prstGeom prst="rect">
+            <a:avLst/>
+          </a:prstGeom>
+          <a:noFill/>
+        </p:spPr>
+        <p:txBody>
+          <a:bodyPr wrap="square">
+            <a:spAutoFit/>
+          </a:bodyPr>
+          <a:lstStyle/>
+          <a:p>
+            <a:r>
+              <a:rPr sz="2600" b="1">
+                <a:solidFill>
+                  <a:srgbClr val="0B3D2E"/>
+                </a:solidFill>
+              </a:rPr>
+              <a:t>❓ Preguntas frecuentes</a:t>
+            </a:r>
+          </a:p>
+        </p:txBody>
+      </p:sp>
+      <p:sp>
+        <p:nvSpPr>
+          <p:cNvPr id="3" name="TextBox 2"/>
+          <p:cNvSpPr txBox="1"/>
+          <p:nvPr/>
+        </p:nvSpPr>
+        <p:spPr>
+          <a:xfrm>
+            <a:off x="457200" y="1280160"/>
+            <a:ext cx="8229600" cy="4937760"/>
+          </a:xfrm>
+          <a:prstGeom prst="rect">
+            <a:avLst/>
+          </a:prstGeom>
+          <a:noFill/>
+        </p:spPr>
+        <p:txBody>
+          <a:bodyPr wrap="square">
+            <a:spAutoFit/>
+          </a:bodyPr>
+          <a:lstStyle/>
+          <a:p>
+            <a:pPr>
+              <a:spcAft>
+                <a:spcPts val="600"/>
+              </a:spcAft>
+            </a:pPr>
+            <a:r>
+              <a:rPr sz="1500">
+                <a:solidFill>
+                  <a:srgbClr val="22282E"/>
+                </a:solidFill>
+              </a:rPr>
+              <a:t>•  ❓ ¿Basta validar la extensión?</a:t>
+            </a:r>
+          </a:p>
+          <a:p>
+            <a:pPr>
+              <a:spcAft>
+                <a:spcPts val="600"/>
+              </a:spcAft>
+            </a:pPr>
+            <a:r>
+              <a:rPr sz="1500">
+                <a:solidFill>
+                  <a:srgbClr val="22282E"/>
+                </a:solidFill>
+              </a:rPr>
+              <a:t>•  No. Hay que validar tipo real, renombrar, y sobre todo almacenar donde no se ejecute el contenido.</a:t>
+            </a:r>
+          </a:p>
+          <a:p>
+            <a:pPr>
+              <a:spcAft>
+                <a:spcPts val="600"/>
+              </a:spcAft>
+            </a:pPr>
+            <a:r>
+              <a:rPr sz="1500">
+                <a:solidFill>
+                  <a:srgbClr val="22282E"/>
+                </a:solidFill>
+              </a:rPr>
+              <a:t>•  ❓ ¿Por qué un SVG es peligroso?</a:t>
+            </a:r>
+          </a:p>
+          <a:p>
+            <a:pPr>
+              <a:spcAft>
+                <a:spcPts val="600"/>
+              </a:spcAft>
+            </a:pPr>
+            <a:r>
+              <a:rPr sz="1500">
+                <a:solidFill>
+                  <a:srgbClr val="22282E"/>
+                </a:solidFill>
+              </a:rPr>
+              <a:t>•  Porque es XML y puede contener JavaScript; servido inline, ejecuta XSS en el contexto de la app.</a:t>
+            </a:r>
+          </a:p>
+          <a:p>
+            <a:pPr>
+              <a:spcAft>
+                <a:spcPts val="600"/>
+              </a:spcAft>
+            </a:pPr>
+            <a:r>
+              <a:rPr sz="1500">
+                <a:solidFill>
+                  <a:srgbClr val="22282E"/>
+                </a:solidFill>
+              </a:rPr>
+              <a:t>•  ❓ ¿Dónde guardo los uploads?</a:t>
+            </a:r>
+          </a:p>
+          <a:p>
+            <a:pPr>
+              <a:spcAft>
+                <a:spcPts val="600"/>
+              </a:spcAft>
+            </a:pPr>
+            <a:r>
+              <a:rPr sz="1500">
+                <a:solidFill>
+                  <a:srgbClr val="22282E"/>
+                </a:solidFill>
+              </a:rPr>
+              <a:t>•  Fuera del directorio web servible, con nombres generados, y sírvelos con Content-Type y Content-Disposition seguros.</a:t>
+            </a:r>
+          </a:p>
+        </p:txBody>
+      </p:sp>
+    </p:spTree>
+  </p:cSld>
+  <p:clrMapOvr>
+    <a:masterClrMapping/>
+  </p:clrMapOvr>
+</p:sld>
+</file>
+
+<file path=ppt/slides/slide14.xml><?xml version="1.0" encoding="utf-8"?>
+<p:sld xmlns:a="http://schemas.openxmlformats.org/drawingml/2006/main" xmlns:p="http://schemas.openxmlformats.org/presentationml/2006/main" xmlns:r="http://schemas.openxmlformats.org/officeDocument/2006/relationships">
+  <p:cSld>
+    <p:spTree>
+      <p:nvGrpSpPr>
+        <p:cNvPr id="1" name=""/>
+        <p:cNvGrpSpPr/>
+        <p:nvPr/>
+      </p:nvGrpSpPr>
+      <p:grpSpPr/>
+      <p:sp>
+        <p:nvSpPr>
+          <p:cNvPr id="2" name="TextBox 1"/>
+          <p:cNvSpPr txBox="1"/>
+          <p:nvPr/>
+        </p:nvSpPr>
+        <p:spPr>
+          <a:xfrm>
+            <a:off x="457200" y="320040"/>
+            <a:ext cx="8229600" cy="822960"/>
+          </a:xfrm>
+          <a:prstGeom prst="rect">
+            <a:avLst/>
+          </a:prstGeom>
+          <a:noFill/>
+        </p:spPr>
+        <p:txBody>
+          <a:bodyPr wrap="square">
+            <a:spAutoFit/>
+          </a:bodyPr>
+          <a:lstStyle/>
+          <a:p>
+            <a:r>
+              <a:rPr sz="2600" b="1">
+                <a:solidFill>
+                  <a:srgbClr val="0B3D2E"/>
+                </a:solidFill>
+              </a:rPr>
+              <a:t>🔗 Referencias</a:t>
+            </a:r>
+          </a:p>
+        </p:txBody>
+      </p:sp>
+      <p:sp>
+        <p:nvSpPr>
+          <p:cNvPr id="3" name="TextBox 2"/>
+          <p:cNvSpPr txBox="1"/>
+          <p:nvPr/>
+        </p:nvSpPr>
+        <p:spPr>
+          <a:xfrm>
+            <a:off x="457200" y="1280160"/>
+            <a:ext cx="8229600" cy="4937760"/>
+          </a:xfrm>
+          <a:prstGeom prst="rect">
+            <a:avLst/>
+          </a:prstGeom>
+          <a:noFill/>
+        </p:spPr>
+        <p:txBody>
+          <a:bodyPr wrap="square">
+            <a:spAutoFit/>
+          </a:bodyPr>
+          <a:lstStyle/>
+          <a:p>
+            <a:pPr>
+              <a:spcAft>
+                <a:spcPts val="600"/>
+              </a:spcAft>
+            </a:pPr>
+            <a:r>
+              <a:rPr sz="1500">
+                <a:solidFill>
+                  <a:srgbClr val="22282E"/>
+                </a:solidFill>
+              </a:rPr>
               <a:t>•  Stuttard &amp; Pinto, The Web Application Hacker's Handbook.</a:t>
             </a:r>
           </a:p>
@@ -3599,6 +3870,81 @@
           </a:p>
         </p:txBody>
       </p:sp>
+    </p:spTree>
+  </p:cSld>
+  <p:clrMapOvr>
+    <a:masterClrMapping/>
+  </p:clrMapOvr>
+</p:sld>
+</file>
+
+<file path=ppt/slides/slide15.xml><?xml version="1.0" encoding="utf-8"?>
+<p:sld xmlns:a="http://schemas.openxmlformats.org/drawingml/2006/main" xmlns:p="http://schemas.openxmlformats.org/presentationml/2006/main" xmlns:r="http://schemas.openxmlformats.org/officeDocument/2006/relationships">
+  <p:cSld>
+    <p:spTree>
+      <p:nvGrpSpPr>
+        <p:cNvPr id="1" name=""/>
+        <p:cNvGrpSpPr/>
+        <p:nvPr/>
+      </p:nvGrpSpPr>
+      <p:grpSpPr/>
+      <p:sp>
+        <p:nvSpPr>
+          <p:cNvPr id="2" name="TextBox 1"/>
+          <p:cNvSpPr txBox="1"/>
+          <p:nvPr/>
+        </p:nvSpPr>
+        <p:spPr>
+          <a:xfrm>
+            <a:off x="457200" y="274320"/>
+            <a:ext cx="8229600" cy="640080"/>
+          </a:xfrm>
+          <a:prstGeom prst="rect">
+            <a:avLst/>
+          </a:prstGeom>
+          <a:noFill/>
+        </p:spPr>
+        <p:txBody>
+          <a:bodyPr wrap="square">
+            <a:spAutoFit/>
+          </a:bodyPr>
+          <a:lstStyle/>
+          <a:p>
+            <a:r>
+              <a:rPr sz="2200" b="1">
+                <a:solidFill>
+                  <a:srgbClr val="0B3D2E"/>
+                </a:solidFill>
+              </a:rPr>
+              <a:t>Diagrama de la clase</a:t>
+            </a:r>
+          </a:p>
+        </p:txBody>
+      </p:sp>
+      <p:pic>
+        <p:nvPicPr>
+          <p:cNvPr id="3" name="Picture 2" descr="99efd771ef1caf9e.png"/>
+          <p:cNvPicPr>
+            <a:picLocks noChangeAspect="1"/>
+          </p:cNvPicPr>
+          <p:nvPr/>
+        </p:nvPicPr>
+        <p:blipFill>
+          <a:blip r:embed="rId2"/>
+          <a:stretch>
+            <a:fillRect/>
+          </a:stretch>
+        </p:blipFill>
+        <p:spPr>
+          <a:xfrm>
+            <a:off x="2589991" y="1097280"/>
+            <a:ext cx="3964017" cy="5303520"/>
+          </a:xfrm>
+          <a:prstGeom prst="rect">
+            <a:avLst/>
+          </a:prstGeom>
+        </p:spPr>
+      </p:pic>
     </p:spTree>
   </p:cSld>
   <p:clrMapOvr>
@@ -3683,7 +4029,7 @@
                   <a:srgbClr val="22282E"/>
                 </a:solidFill>
               </a:rPr>
-              <a:t>•  Explotar fallos en la carga de archivos (file upload): subir contenido malicioso que la aplicación acepta y ejecuta o sirve de forma peligrosa. Un upload mal validado puede convertirse en web shell (RCE), XSS almacenado, path traversal o SSRF.</a:t>
+              <a:t>•  Explotar fallos en la carga de archivos (file upload): subir contenido malicioso que la aplicación acepta y ejecuta o sirve de forma peligrosa. Un upload mal validado puede convertirse en web shell…</a:t>
             </a:r>
           </a:p>
         </p:txBody>
@@ -4077,7 +4423,7 @@
                   <a:srgbClr val="0B3D2E"/>
                 </a:solidFill>
               </a:rPr>
-              <a:t>📖 Definiciones y características</a:t>
+              <a:t>🧠 Explicación en profundidad</a:t>
             </a:r>
           </a:p>
         </p:txBody>
@@ -4115,82 +4461,97 @@
                   <a:srgbClr val="22282E"/>
                 </a:solidFill>
               </a:rPr>
-              <a:t>•  File upload inseguro: aceptar archivos sin validar tipo, contenido o ubicación. Característica: puede llevar a RCE.</a:t>
-            </a:r>
-          </a:p>
-          <a:p>
-            <a:pPr>
-              <a:spcAft>
-                <a:spcPts val="600"/>
-              </a:spcAft>
-            </a:pPr>
-            <a:r>
-              <a:rPr sz="1500">
-                <a:solidFill>
-                  <a:srgbClr val="22282E"/>
-                </a:solidFill>
-              </a:rPr>
-              <a:t>•  Web shell: archivo (p. ej. .php) que ejecuta comandos al accederse. Característica: da control del servidor.</a:t>
-            </a:r>
-          </a:p>
-          <a:p>
-            <a:pPr>
-              <a:spcAft>
-                <a:spcPts val="600"/>
-              </a:spcAft>
-            </a:pPr>
-            <a:r>
-              <a:rPr sz="1500">
-                <a:solidFill>
-                  <a:srgbClr val="22282E"/>
-                </a:solidFill>
-              </a:rPr>
-              <a:t>•  Magic bytes: firma binaria inicial que identifica el tipo real. Característica: se puede falsificar para engañar validaciones.</a:t>
-            </a:r>
-          </a:p>
-          <a:p>
-            <a:pPr>
-              <a:spcAft>
-                <a:spcPts val="600"/>
-              </a:spcAft>
-            </a:pPr>
-            <a:r>
-              <a:rPr sz="1500">
-                <a:solidFill>
-                  <a:srgbClr val="22282E"/>
-                </a:solidFill>
-              </a:rPr>
-              <a:t>•  Blocklist de extensiones: prohibir ciertas extensiones. Característica: frágil; se evade con variantes (.phtml, .php5).</a:t>
-            </a:r>
-          </a:p>
-          <a:p>
-            <a:pPr>
-              <a:spcAft>
-                <a:spcPts val="600"/>
-              </a:spcAft>
-            </a:pPr>
-            <a:r>
-              <a:rPr sz="1500">
-                <a:solidFill>
-                  <a:srgbClr val="22282E"/>
-                </a:solidFill>
-              </a:rPr>
-              <a:t>•  Allowlist: permitir solo extensiones/tipos seguros. Característica: defensa robusta.</a:t>
-            </a:r>
-          </a:p>
-          <a:p>
-            <a:pPr>
-              <a:spcAft>
-                <a:spcPts val="600"/>
-              </a:spcAft>
-            </a:pPr>
-            <a:r>
-              <a:rPr sz="1500">
-                <a:solidFill>
-                  <a:srgbClr val="22282E"/>
-                </a:solidFill>
-              </a:rPr>
-              <a:t>•  Almacenamiento fuera de webroot: guardar uploads donde no se ejecuten. Característica: evita ejecución del contenido subido.</a:t>
+              <a:t>•  La carga de archivos es una funcionalidad omnipresente —foto de perfil, adjuntos, documentos— y una</a:t>
+            </a:r>
+          </a:p>
+          <a:p>
+            <a:pPr>
+              <a:spcAft>
+                <a:spcPts val="600"/>
+              </a:spcAft>
+            </a:pPr>
+            <a:r>
+              <a:rPr sz="1500">
+                <a:solidFill>
+                  <a:srgbClr val="22282E"/>
+                </a:solidFill>
+              </a:rPr>
+              <a:t>•  fuente frecuente de compromisos graves, porque un fichero subido no es solo datos: según dónde se</a:t>
+            </a:r>
+          </a:p>
+          <a:p>
+            <a:pPr>
+              <a:spcAft>
+                <a:spcPts val="600"/>
+              </a:spcAft>
+            </a:pPr>
+            <a:r>
+              <a:rPr sz="1500">
+                <a:solidFill>
+                  <a:srgbClr val="22282E"/>
+                </a:solidFill>
+              </a:rPr>
+              <a:t>•  guarde y cómo se sirva, puede convertirse en código que el servidor ejecuta. El escenario más</a:t>
+            </a:r>
+          </a:p>
+          <a:p>
+            <a:pPr>
+              <a:spcAft>
+                <a:spcPts val="600"/>
+              </a:spcAft>
+            </a:pPr>
+            <a:r>
+              <a:rPr sz="1500">
+                <a:solidFill>
+                  <a:srgbClr val="22282E"/>
+                </a:solidFill>
+              </a:rPr>
+              <a:t>•  crítico es el web shell: si el atacante consigue subir un fichero con extensión ejecutable (.php,</a:t>
+            </a:r>
+          </a:p>
+          <a:p>
+            <a:pPr>
+              <a:spcAft>
+                <a:spcPts val="600"/>
+              </a:spcAft>
+            </a:pPr>
+            <a:r>
+              <a:rPr sz="1500">
+                <a:solidFill>
+                  <a:srgbClr val="22282E"/>
+                </a:solidFill>
+              </a:rPr>
+              <a:t>•  .jsp, .aspx) a una carpeta desde la que el servidor ejecuta scripts, y luego lo visita, el</a:t>
+            </a:r>
+          </a:p>
+          <a:p>
+            <a:pPr>
+              <a:spcAft>
+                <a:spcPts val="600"/>
+              </a:spcAft>
+            </a:pPr>
+            <a:r>
+              <a:rPr sz="1500">
+                <a:solidFill>
+                  <a:srgbClr val="22282E"/>
+                </a:solidFill>
+              </a:rPr>
+              <a:t>•  servidor ejecuta ese código y el atacante obtiene RCE. Por eso la carga de archivos es un punto que se</a:t>
+            </a:r>
+          </a:p>
+          <a:p>
+            <a:pPr>
+              <a:spcAft>
+                <a:spcPts val="600"/>
+              </a:spcAft>
+            </a:pPr>
+            <a:r>
+              <a:rPr sz="1500">
+                <a:solidFill>
+                  <a:srgbClr val="22282E"/>
+                </a:solidFill>
+              </a:rPr>
+              <a:t>•  audita siempre y con cuidado.</a:t>
             </a:r>
           </a:p>
         </p:txBody>
@@ -4241,7 +4602,7 @@
                   <a:srgbClr val="0B3D2E"/>
                 </a:solidFill>
               </a:rPr>
-              <a:t>🧰 Herramientas y preparación</a:t>
+              <a:t>📖 Definiciones y características</a:t>
             </a:r>
           </a:p>
         </p:txBody>
@@ -4279,37 +4640,82 @@
                   <a:srgbClr val="22282E"/>
                 </a:solidFill>
               </a:rPr>
-              <a:t>•  DVWA (File Upload) y PortSwigger labs de file upload.</a:t>
-            </a:r>
-          </a:p>
-          <a:p>
-            <a:pPr>
-              <a:spcAft>
-                <a:spcPts val="600"/>
-              </a:spcAft>
-            </a:pPr>
-            <a:r>
-              <a:rPr sz="1500">
-                <a:solidFill>
-                  <a:srgbClr val="22282E"/>
-                </a:solidFill>
-              </a:rPr>
-              <a:t>•  Burp para modificar el nombre, extensión y Content-Type en la petición.</a:t>
-            </a:r>
-          </a:p>
-          <a:p>
-            <a:pPr>
-              <a:spcAft>
-                <a:spcPts val="600"/>
-              </a:spcAft>
-            </a:pPr>
-            <a:r>
-              <a:rPr sz="1500">
-                <a:solidFill>
-                  <a:srgbClr val="22282E"/>
-                </a:solidFill>
-              </a:rPr>
-              <a:t>•  Una web shell mínima de laboratorio (p. ej. PHP que ejecute $GET['cmd']).</a:t>
+              <a:t>•  File upload inseguro: aceptar archivos sin validar tipo, contenido o ubicación. Característica: puede llevar a RCE.</a:t>
+            </a:r>
+          </a:p>
+          <a:p>
+            <a:pPr>
+              <a:spcAft>
+                <a:spcPts val="600"/>
+              </a:spcAft>
+            </a:pPr>
+            <a:r>
+              <a:rPr sz="1500">
+                <a:solidFill>
+                  <a:srgbClr val="22282E"/>
+                </a:solidFill>
+              </a:rPr>
+              <a:t>•  Web shell: archivo (p. ej. .php) que ejecuta comandos al accederse. Característica: da control del servidor.</a:t>
+            </a:r>
+          </a:p>
+          <a:p>
+            <a:pPr>
+              <a:spcAft>
+                <a:spcPts val="600"/>
+              </a:spcAft>
+            </a:pPr>
+            <a:r>
+              <a:rPr sz="1500">
+                <a:solidFill>
+                  <a:srgbClr val="22282E"/>
+                </a:solidFill>
+              </a:rPr>
+              <a:t>•  Magic bytes: firma binaria inicial que identifica el tipo real. Característica: se puede falsificar para engañar validaciones.</a:t>
+            </a:r>
+          </a:p>
+          <a:p>
+            <a:pPr>
+              <a:spcAft>
+                <a:spcPts val="600"/>
+              </a:spcAft>
+            </a:pPr>
+            <a:r>
+              <a:rPr sz="1500">
+                <a:solidFill>
+                  <a:srgbClr val="22282E"/>
+                </a:solidFill>
+              </a:rPr>
+              <a:t>•  Blocklist de extensiones: prohibir ciertas extensiones. Característica: frágil; se evade con variantes (.phtml, .php5).</a:t>
+            </a:r>
+          </a:p>
+          <a:p>
+            <a:pPr>
+              <a:spcAft>
+                <a:spcPts val="600"/>
+              </a:spcAft>
+            </a:pPr>
+            <a:r>
+              <a:rPr sz="1500">
+                <a:solidFill>
+                  <a:srgbClr val="22282E"/>
+                </a:solidFill>
+              </a:rPr>
+              <a:t>•  Allowlist: permitir solo extensiones/tipos seguros. Característica: defensa robusta.</a:t>
+            </a:r>
+          </a:p>
+          <a:p>
+            <a:pPr>
+              <a:spcAft>
+                <a:spcPts val="600"/>
+              </a:spcAft>
+            </a:pPr>
+            <a:r>
+              <a:rPr sz="1500">
+                <a:solidFill>
+                  <a:srgbClr val="22282E"/>
+                </a:solidFill>
+              </a:rPr>
+              <a:t>•  Almacenamiento fuera de webroot: guardar uploads donde no se ejecuten. Característica: evita ejecución del contenido subido.</a:t>
             </a:r>
           </a:p>
         </p:txBody>
@@ -4360,7 +4766,7 @@
                   <a:srgbClr val="0B3D2E"/>
                 </a:solidFill>
               </a:rPr>
-              <a:t>🧪 Laboratorio guiado</a:t>
+              <a:t>📔 Glosario</a:t>
             </a:r>
           </a:p>
         </p:txBody>
@@ -4398,97 +4804,97 @@
                   <a:srgbClr val="22282E"/>
                 </a:solidFill>
               </a:rPr>
-              <a:t>•  En DVWA → File Upload, sube una imagen normal y observa dónde se guarda y cómo se sirve.</a:t>
-            </a:r>
-          </a:p>
-          <a:p>
-            <a:pPr>
-              <a:spcAft>
-                <a:spcPts val="600"/>
-              </a:spcAft>
-            </a:pPr>
-            <a:r>
-              <a:rPr sz="1500">
-                <a:solidFill>
-                  <a:srgbClr val="22282E"/>
-                </a:solidFill>
-              </a:rPr>
-              <a:t>•  Sube una web shell PHP simple; si se bloquea por extensión, prueba variantes: .phtml, .php5, .pHp.</a:t>
-            </a:r>
-          </a:p>
-          <a:p>
-            <a:pPr>
-              <a:spcAft>
-                <a:spcPts val="600"/>
-              </a:spcAft>
-            </a:pPr>
-            <a:r>
-              <a:rPr sz="1500">
-                <a:solidFill>
-                  <a:srgbClr val="22282E"/>
-                </a:solidFill>
-              </a:rPr>
-              <a:t>•  Evade validación por Content-Type: cambia el header a image/png en Burp manteniendo el contenido PHP.</a:t>
-            </a:r>
-          </a:p>
-          <a:p>
-            <a:pPr>
-              <a:spcAft>
-                <a:spcPts val="600"/>
-              </a:spcAft>
-            </a:pPr>
-            <a:r>
-              <a:rPr sz="1500">
-                <a:solidFill>
-                  <a:srgbClr val="22282E"/>
-                </a:solidFill>
-              </a:rPr>
-              <a:t>•  Evade validación por magic bytes: antepone GIF89a; al código PHP.</a:t>
-            </a:r>
-          </a:p>
-          <a:p>
-            <a:pPr>
-              <a:spcAft>
-                <a:spcPts val="600"/>
-              </a:spcAft>
-            </a:pPr>
-            <a:r>
-              <a:rPr sz="1500">
-                <a:solidFill>
-                  <a:srgbClr val="22282E"/>
-                </a:solidFill>
-              </a:rPr>
-              <a:t>•  Accede a la URL del archivo subido y ejecuta un comando (?cmd=id) en el lab.</a:t>
-            </a:r>
-          </a:p>
-          <a:p>
-            <a:pPr>
-              <a:spcAft>
-                <a:spcPts val="600"/>
-              </a:spcAft>
-            </a:pPr>
-            <a:r>
-              <a:rPr sz="1500">
-                <a:solidFill>
-                  <a:srgbClr val="22282E"/>
-                </a:solidFill>
-              </a:rPr>
-              <a:t>•  Prueba vectores alternativos: sube un SVG con XSS, o un nombre con ../ para path traversal.</a:t>
-            </a:r>
-          </a:p>
-          <a:p>
-            <a:pPr>
-              <a:spcAft>
-                <a:spcPts val="600"/>
-              </a:spcAft>
-            </a:pPr>
-            <a:r>
-              <a:rPr sz="1500">
-                <a:solidFill>
-                  <a:srgbClr val="22282E"/>
-                </a:solidFill>
-              </a:rPr>
-              <a:t>•  Documenta la validación evadida, el payload y el impacto.</a:t>
+              <a:t>•  Término — Definición concisa</a:t>
+            </a:r>
+          </a:p>
+          <a:p>
+            <a:pPr>
+              <a:spcAft>
+                <a:spcPts val="600"/>
+              </a:spcAft>
+            </a:pPr>
+            <a:r>
+              <a:rPr sz="1500">
+                <a:solidFill>
+                  <a:srgbClr val="22282E"/>
+                </a:solidFill>
+              </a:rPr>
+              <a:t>•  Carga de archivos — Funcionalidad de subir ficheros; superficie de ataque frecuente</a:t>
+            </a:r>
+          </a:p>
+          <a:p>
+            <a:pPr>
+              <a:spcAft>
+                <a:spcPts val="600"/>
+              </a:spcAft>
+            </a:pPr>
+            <a:r>
+              <a:rPr sz="1500">
+                <a:solidFill>
+                  <a:srgbClr val="22282E"/>
+                </a:solidFill>
+              </a:rPr>
+              <a:t>•  Web shell — Fichero ejecutable subido que da RCE al visitarlo</a:t>
+            </a:r>
+          </a:p>
+          <a:p>
+            <a:pPr>
+              <a:spcAft>
+                <a:spcPts val="600"/>
+              </a:spcAft>
+            </a:pPr>
+            <a:r>
+              <a:rPr sz="1500">
+                <a:solidFill>
+                  <a:srgbClr val="22282E"/>
+                </a:solidFill>
+              </a:rPr>
+              <a:t>•  Validación por extensión — Comprobar el sufijo; evadible con blocklist</a:t>
+            </a:r>
+          </a:p>
+          <a:p>
+            <a:pPr>
+              <a:spcAft>
+                <a:spcPts val="600"/>
+              </a:spcAft>
+            </a:pPr>
+            <a:r>
+              <a:rPr sz="1500">
+                <a:solidFill>
+                  <a:srgbClr val="22282E"/>
+                </a:solidFill>
+              </a:rPr>
+              <a:t>•  Doble extensión — archivo.php.jpg en servidores mal configurados</a:t>
+            </a:r>
+          </a:p>
+          <a:p>
+            <a:pPr>
+              <a:spcAft>
+                <a:spcPts val="600"/>
+              </a:spcAft>
+            </a:pPr>
+            <a:r>
+              <a:rPr sz="1500">
+                <a:solidFill>
+                  <a:srgbClr val="22282E"/>
+                </a:solidFill>
+              </a:rPr>
+              <a:t>•  Byte nulo — shell.php%00.jpg; truco histórico de bypass</a:t>
+            </a:r>
+          </a:p>
+          <a:p>
+            <a:pPr>
+              <a:spcAft>
+                <a:spcPts val="600"/>
+              </a:spcAft>
+            </a:pPr>
+            <a:r>
+              <a:rPr sz="1500">
+                <a:solidFill>
+                  <a:srgbClr val="22282E"/>
+                </a:solidFill>
+              </a:rPr>
+              <a:t>•  Content-Type — Cabecera puesta por el cliente; se falsea</a:t>
             </a:r>
           </a:p>
         </p:txBody>
@@ -4539,7 +4945,7 @@
                   <a:srgbClr val="0B3D2E"/>
                 </a:solidFill>
               </a:rPr>
-              <a:t>✍️ Ejercicios</a:t>
+              <a:t>🧰 Herramientas y preparación</a:t>
             </a:r>
           </a:p>
         </p:txBody>
@@ -4577,82 +4983,37 @@
                   <a:srgbClr val="22282E"/>
                 </a:solidFill>
               </a:rPr>
-              <a:t>•  Enumera 5 extensiones alternativas que pueden ejecutar código PHP.</a:t>
-            </a:r>
-          </a:p>
-          <a:p>
-            <a:pPr>
-              <a:spcAft>
-                <a:spcPts val="600"/>
-              </a:spcAft>
-            </a:pPr>
-            <a:r>
-              <a:rPr sz="1500">
-                <a:solidFill>
-                  <a:srgbClr val="22282E"/>
-                </a:solidFill>
-              </a:rPr>
-              <a:t>•  Evade una validación por Content-Type y otra por magic bytes.</a:t>
-            </a:r>
-          </a:p>
-          <a:p>
-            <a:pPr>
-              <a:spcAft>
-                <a:spcPts val="600"/>
-              </a:spcAft>
-            </a:pPr>
-            <a:r>
-              <a:rPr sz="1500">
-                <a:solidFill>
-                  <a:srgbClr val="22282E"/>
-                </a:solidFill>
-              </a:rPr>
-              <a:t>•  Sube un SVG que ejecute JavaScript (XSS almacenado).</a:t>
-            </a:r>
-          </a:p>
-          <a:p>
-            <a:pPr>
-              <a:spcAft>
-                <a:spcPts val="600"/>
-              </a:spcAft>
-            </a:pPr>
-            <a:r>
-              <a:rPr sz="1500">
-                <a:solidFill>
-                  <a:srgbClr val="22282E"/>
-                </a:solidFill>
-              </a:rPr>
-              <a:t>•  Usa ../ en el nombre para intentar sobrescribir un archivo.</a:t>
-            </a:r>
-          </a:p>
-          <a:p>
-            <a:pPr>
-              <a:spcAft>
-                <a:spcPts val="600"/>
-              </a:spcAft>
-            </a:pPr>
-            <a:r>
-              <a:rPr sz="1500">
-                <a:solidFill>
-                  <a:srgbClr val="22282E"/>
-                </a:solidFill>
-              </a:rPr>
-              <a:t>•  Explica por qué guardar fuera del webroot mitiga el RCE.</a:t>
-            </a:r>
-          </a:p>
-          <a:p>
-            <a:pPr>
-              <a:spcAft>
-                <a:spcPts val="600"/>
-              </a:spcAft>
-            </a:pPr>
-            <a:r>
-              <a:rPr sz="1500">
-                <a:solidFill>
-                  <a:srgbClr val="22282E"/>
-                </a:solidFill>
-              </a:rPr>
-              <a:t>•  Diseña una validación de upload robusta (allowlist + renombrado + escaneo).</a:t>
+              <a:t>•  DVWA (File Upload) y PortSwigger labs de file upload.</a:t>
+            </a:r>
+          </a:p>
+          <a:p>
+            <a:pPr>
+              <a:spcAft>
+                <a:spcPts val="600"/>
+              </a:spcAft>
+            </a:pPr>
+            <a:r>
+              <a:rPr sz="1500">
+                <a:solidFill>
+                  <a:srgbClr val="22282E"/>
+                </a:solidFill>
+              </a:rPr>
+              <a:t>•  Burp para modificar el nombre, extensión y Content-Type en la petición.</a:t>
+            </a:r>
+          </a:p>
+          <a:p>
+            <a:pPr>
+              <a:spcAft>
+                <a:spcPts val="600"/>
+              </a:spcAft>
+            </a:pPr>
+            <a:r>
+              <a:rPr sz="1500">
+                <a:solidFill>
+                  <a:srgbClr val="22282E"/>
+                </a:solidFill>
+              </a:rPr>
+              <a:t>•  Una web shell mínima de laboratorio (p. ej. PHP que ejecute $GET['cmd']).</a:t>
             </a:r>
           </a:p>
         </p:txBody>
@@ -4703,7 +5064,7 @@
                   <a:srgbClr val="0B3D2E"/>
                 </a:solidFill>
               </a:rPr>
-              <a:t>📝 Reto verificable</a:t>
+              <a:t>🧪 Laboratorio guiado</a:t>
             </a:r>
           </a:p>
         </p:txBody>
@@ -4741,22 +5102,97 @@
                   <a:srgbClr val="22282E"/>
                 </a:solidFill>
               </a:rPr>
-              <a:t>•  Consigue RCE subiendo una web shell en un lab (DVWA Medium o PortSwigger) evadiendo al menos una validación, y ejecuta un comando.</a:t>
-            </a:r>
-          </a:p>
-          <a:p>
-            <a:pPr>
-              <a:spcAft>
-                <a:spcPts val="600"/>
-              </a:spcAft>
-            </a:pPr>
-            <a:r>
-              <a:rPr sz="1500">
-                <a:solidFill>
-                  <a:srgbClr val="22282E"/>
-                </a:solidFill>
-              </a:rPr>
-              <a:t>•  Criterio de aceptación: entregas el archivo subido, la validación evadida, la evidencia de ejecución de comando y la corrección (allowlist, renombrado, almacenamiento fuera del webroot).</a:t>
+              <a:t>•  En DVWA → File Upload, sube una imagen normal y observa dónde se guarda y cómo se sirve.</a:t>
+            </a:r>
+          </a:p>
+          <a:p>
+            <a:pPr>
+              <a:spcAft>
+                <a:spcPts val="600"/>
+              </a:spcAft>
+            </a:pPr>
+            <a:r>
+              <a:rPr sz="1500">
+                <a:solidFill>
+                  <a:srgbClr val="22282E"/>
+                </a:solidFill>
+              </a:rPr>
+              <a:t>•  Sube una web shell PHP simple; si se bloquea por extensión, prueba variantes: .phtml, .php5, .pHp.</a:t>
+            </a:r>
+          </a:p>
+          <a:p>
+            <a:pPr>
+              <a:spcAft>
+                <a:spcPts val="600"/>
+              </a:spcAft>
+            </a:pPr>
+            <a:r>
+              <a:rPr sz="1500">
+                <a:solidFill>
+                  <a:srgbClr val="22282E"/>
+                </a:solidFill>
+              </a:rPr>
+              <a:t>•  Evade validación por Content-Type: cambia el header a image/png en Burp manteniendo el contenido PHP.</a:t>
+            </a:r>
+          </a:p>
+          <a:p>
+            <a:pPr>
+              <a:spcAft>
+                <a:spcPts val="600"/>
+              </a:spcAft>
+            </a:pPr>
+            <a:r>
+              <a:rPr sz="1500">
+                <a:solidFill>
+                  <a:srgbClr val="22282E"/>
+                </a:solidFill>
+              </a:rPr>
+              <a:t>•  Evade validación por magic bytes: antepone GIF89a; al código PHP.</a:t>
+            </a:r>
+          </a:p>
+          <a:p>
+            <a:pPr>
+              <a:spcAft>
+                <a:spcPts val="600"/>
+              </a:spcAft>
+            </a:pPr>
+            <a:r>
+              <a:rPr sz="1500">
+                <a:solidFill>
+                  <a:srgbClr val="22282E"/>
+                </a:solidFill>
+              </a:rPr>
+              <a:t>•  Accede a la URL del archivo subido y ejecuta un comando (?cmd=id) en el lab.</a:t>
+            </a:r>
+          </a:p>
+          <a:p>
+            <a:pPr>
+              <a:spcAft>
+                <a:spcPts val="600"/>
+              </a:spcAft>
+            </a:pPr>
+            <a:r>
+              <a:rPr sz="1500">
+                <a:solidFill>
+                  <a:srgbClr val="22282E"/>
+                </a:solidFill>
+              </a:rPr>
+              <a:t>•  Prueba vectores alternativos: sube un SVG con XSS, o un nombre con ../ para path traversal.</a:t>
+            </a:r>
+          </a:p>
+          <a:p>
+            <a:pPr>
+              <a:spcAft>
+                <a:spcPts val="600"/>
+              </a:spcAft>
+            </a:pPr>
+            <a:r>
+              <a:rPr sz="1500">
+                <a:solidFill>
+                  <a:srgbClr val="22282E"/>
+                </a:solidFill>
+              </a:rPr>
+              <a:t>•  Documenta la validación evadida, el payload y el impacto.</a:t>
             </a:r>
           </a:p>
         </p:txBody>
